--- a/dist/초2/환경·생태/생활과환경/초2_환경·생태_생활과환경_01_학교와마을의환경_학생용.pptx
+++ b/dist/초2/환경·생태/생활과환경/초2_환경·생태_생활과환경_01_학교와마을의환경_학생용.pptx
@@ -115,41 +115,41 @@
   <p:extLst>
     <p:ext uri="{521415D9-36F7-43E2-AB2F-B90AF26B5E84}">
       <p14:sectionLst xmlns:p14="http://schemas.microsoft.com/office/powerpoint/2010/main">
-        <p14:section name="도입" id="{169f54b3-57ca-d0ec-5c0e-3b666a9eb953}">
+        <p14:section name="도입" id="{26123985-4b1a-154c-fe2e-98e358318cd6}">
           <p14:sldIdLst>
             <p14:sldId id="256"/>
             <p14:sldId id="257"/>
           </p14:sldIdLst>
         </p14:section>
-        <p14:section name="개념" id="{9aed23c6-970d-09e9-55f7-8b4f8c8c79e1}">
+        <p14:section name="개념" id="{e156da47-0f5e-49a1-bdee-08dcb1647e35}">
           <p14:sldIdLst>
             <p14:sldId id="258"/>
             <p14:sldId id="260"/>
           </p14:sldIdLst>
         </p14:section>
-        <p14:section name="연습" id="{01e2938d-4b38-9383-a23a-95d9b6519d22}">
+        <p14:section name="연습" id="{ee8d31d6-23e5-395f-6e8d-eafa083a9771}">
           <p14:sldIdLst>
             <p14:sldId id="259"/>
             <p14:sldId id="261"/>
           </p14:sldIdLst>
         </p14:section>
-        <p14:section name="개념" id="{7da59c78-a2a2-0b01-b3d5-3e87728b393e}">
+        <p14:section name="개념" id="{4e786a5d-1085-ae20-0460-42ffb30fd500}">
           <p14:sldIdLst/>
         </p14:section>
-        <p14:section name="연습" id="{9f64153a-1f56-f1b0-225d-5f9a74ad049d}">
+        <p14:section name="연습" id="{d86fe57f-9864-c3fd-ed70-a08153b0ab97}">
           <p14:sldIdLst/>
         </p14:section>
-        <p14:section name="확인" id="{1dbbddbf-e4ce-bff1-5666-8e8191677e5f}">
+        <p14:section name="확인" id="{eea0451e-325b-2226-9946-747aa43b70ac}">
           <p14:sldIdLst>
             <p14:sldId id="262"/>
           </p14:sldIdLst>
         </p14:section>
-        <p14:section name="정리" id="{1e3b3ea3-15dd-f5a9-8e7c-6ca1f188a02f}">
+        <p14:section name="정리" id="{42be1596-ff83-287c-4331-63f90a2c7f11}">
           <p14:sldIdLst>
             <p14:sldId id="263"/>
           </p14:sldIdLst>
         </p14:section>
-        <p14:section name="보충" id="{0afbccca-0af0-4caf-7255-3a25b14bcd28}">
+        <p14:section name="보충" id="{af1832a5-937c-186f-b783-5f21c67d011e}">
           <p14:sldIdLst>
             <p14:sldId id="264"/>
           </p14:sldIdLst>
@@ -3645,14 +3645,14 @@
       </p:sp>
       <p:sp>
         <p:nvSpPr>
-          <p:cNvPr id="6" name="S04-figure22" descr="지어낸 하늘 마을 지도. 위쪽에 나무 세 그루가 있는 공원, 학교, 공사장이 있고, 가운데로 횡단보도가 있는 큰길이 지나며, 아래쪽에 집, 놀이터, 쓰레기 쌓인 곳이 있다."/>
+          <p:cNvPr id="6" name="S04-figure22" descr="지어낸 하늘 마을 지도. 위쪽에 나무 네 그루가 있는 공원, 학교, 공사장이 있고, 가운데로 횡단보도가 있는 큰길이 지나며, 아래쪽에 집, 놀이터, 쓰레기 쌓인 곳이 있다."/>
           <p:cNvSpPr/>
           <p:nvPr/>
         </p:nvSpPr>
         <p:spPr>
           <a:xfrm>
-            <a:off x="6450199" y="2330289"/>
-            <a:ext cx="1623234" cy="959184"/>
+            <a:off x="6607771" y="2110740"/>
+            <a:ext cx="1418102" cy="1119554"/>
           </a:xfrm>
           <a:custGeom>
             <a:avLst/>
@@ -3661,15 +3661,15 @@
             <a:cxnLst/>
             <a:rect l="l" t="t" r="r" b="b"/>
             <a:pathLst>
-              <a:path w="1623234" h="959184">
+              <a:path w="1418102" h="1119554">
                 <a:moveTo>
-                  <a:pt x="0" y="959184"/>
+                  <a:pt x="0" y="1119554"/>
                 </a:moveTo>
                 <a:lnTo>
-                  <a:pt x="1623234" y="959184"/>
+                  <a:pt x="1418102" y="1119554"/>
                 </a:lnTo>
                 <a:lnTo>
-                  <a:pt x="1623234" y="0"/>
+                  <a:pt x="1418102" y="0"/>
                 </a:lnTo>
                 <a:lnTo>
                   <a:pt x="0" y="0"/>
@@ -3697,8 +3697,8 @@
         </p:nvSpPr>
         <p:spPr>
           <a:xfrm>
-            <a:off x="8294784" y="2330289"/>
-            <a:ext cx="1475667" cy="959184"/>
+            <a:off x="8249783" y="2110740"/>
+            <a:ext cx="1418102" cy="1119554"/>
           </a:xfrm>
           <a:custGeom>
             <a:avLst/>
@@ -3707,15 +3707,15 @@
             <a:cxnLst/>
             <a:rect l="l" t="t" r="r" b="b"/>
             <a:pathLst>
-              <a:path w="1475667" h="959184">
+              <a:path w="1418102" h="1119554">
                 <a:moveTo>
-                  <a:pt x="0" y="959184"/>
+                  <a:pt x="0" y="1119554"/>
                 </a:moveTo>
                 <a:lnTo>
-                  <a:pt x="1475667" y="959184"/>
+                  <a:pt x="1418102" y="1119554"/>
                 </a:lnTo>
                 <a:lnTo>
-                  <a:pt x="1475667" y="0"/>
+                  <a:pt x="1418102" y="0"/>
                 </a:lnTo>
                 <a:lnTo>
                   <a:pt x="0" y="0"/>
@@ -3743,8 +3743,8 @@
         </p:nvSpPr>
         <p:spPr>
           <a:xfrm>
-            <a:off x="9991801" y="2330289"/>
-            <a:ext cx="1475667" cy="959184"/>
+            <a:off x="9891796" y="2110740"/>
+            <a:ext cx="1418102" cy="1119554"/>
           </a:xfrm>
           <a:custGeom>
             <a:avLst/>
@@ -3753,15 +3753,15 @@
             <a:cxnLst/>
             <a:rect l="l" t="t" r="r" b="b"/>
             <a:pathLst>
-              <a:path w="1475667" h="959184">
+              <a:path w="1418102" h="1119554">
                 <a:moveTo>
-                  <a:pt x="0" y="959184"/>
+                  <a:pt x="0" y="1119554"/>
                 </a:moveTo>
                 <a:lnTo>
-                  <a:pt x="1475667" y="959184"/>
+                  <a:pt x="1418102" y="1119554"/>
                 </a:lnTo>
                 <a:lnTo>
-                  <a:pt x="1475667" y="0"/>
+                  <a:pt x="1418102" y="0"/>
                 </a:lnTo>
                 <a:lnTo>
                   <a:pt x="0" y="0"/>
@@ -3789,8 +3789,8 @@
         </p:nvSpPr>
         <p:spPr>
           <a:xfrm>
-            <a:off x="6376416" y="3473931"/>
-            <a:ext cx="5164836" cy="405809"/>
+            <a:off x="6533134" y="3379568"/>
+            <a:ext cx="4851400" cy="447822"/>
           </a:xfrm>
           <a:custGeom>
             <a:avLst/>
@@ -3799,15 +3799,15 @@
             <a:cxnLst/>
             <a:rect l="l" t="t" r="r" b="b"/>
             <a:pathLst>
-              <a:path w="5164836" h="405809">
+              <a:path w="4851400" h="447822">
                 <a:moveTo>
-                  <a:pt x="0" y="405809"/>
+                  <a:pt x="0" y="447822"/>
                 </a:moveTo>
                 <a:lnTo>
-                  <a:pt x="5164836" y="405809"/>
+                  <a:pt x="4851400" y="447822"/>
                 </a:lnTo>
                 <a:lnTo>
-                  <a:pt x="5164836" y="0"/>
+                  <a:pt x="4851400" y="0"/>
                 </a:lnTo>
                 <a:lnTo>
                   <a:pt x="0" y="0"/>
@@ -3830,8 +3830,8 @@
         </p:nvSpPr>
         <p:spPr>
           <a:xfrm>
-            <a:off x="8811267" y="3787510"/>
-            <a:ext cx="442700" cy="55338"/>
+            <a:off x="8734923" y="3726629"/>
+            <a:ext cx="447822" cy="55978"/>
           </a:xfrm>
           <a:custGeom>
             <a:avLst/>
@@ -3840,15 +3840,15 @@
             <a:cxnLst/>
             <a:rect l="l" t="t" r="r" b="b"/>
             <a:pathLst>
-              <a:path w="442700" h="55338">
+              <a:path w="447822" h="55978">
                 <a:moveTo>
-                  <a:pt x="0" y="55338"/>
+                  <a:pt x="0" y="55978"/>
                 </a:moveTo>
                 <a:lnTo>
-                  <a:pt x="442700" y="55338"/>
+                  <a:pt x="447822" y="55978"/>
                 </a:lnTo>
                 <a:lnTo>
-                  <a:pt x="442700" y="0"/>
+                  <a:pt x="447822" y="0"/>
                 </a:lnTo>
                 <a:lnTo>
                   <a:pt x="0" y="0"/>
@@ -3871,8 +3871,8 @@
         </p:nvSpPr>
         <p:spPr>
           <a:xfrm>
-            <a:off x="8811267" y="3676835"/>
-            <a:ext cx="442700" cy="55338"/>
+            <a:off x="8734923" y="3614674"/>
+            <a:ext cx="447822" cy="55978"/>
           </a:xfrm>
           <a:custGeom>
             <a:avLst/>
@@ -3881,15 +3881,15 @@
             <a:cxnLst/>
             <a:rect l="l" t="t" r="r" b="b"/>
             <a:pathLst>
-              <a:path w="442700" h="55338">
+              <a:path w="447822" h="55978">
                 <a:moveTo>
-                  <a:pt x="0" y="55338"/>
+                  <a:pt x="0" y="55978"/>
                 </a:moveTo>
                 <a:lnTo>
-                  <a:pt x="442700" y="55338"/>
+                  <a:pt x="447822" y="55978"/>
                 </a:lnTo>
                 <a:lnTo>
-                  <a:pt x="442700" y="0"/>
+                  <a:pt x="447822" y="0"/>
                 </a:lnTo>
                 <a:lnTo>
                   <a:pt x="0" y="0"/>
@@ -3912,8 +3912,8 @@
         </p:nvSpPr>
         <p:spPr>
           <a:xfrm>
-            <a:off x="8811267" y="3566160"/>
-            <a:ext cx="442700" cy="55338"/>
+            <a:off x="8734923" y="3502719"/>
+            <a:ext cx="447822" cy="55978"/>
           </a:xfrm>
           <a:custGeom>
             <a:avLst/>
@@ -3922,15 +3922,15 @@
             <a:cxnLst/>
             <a:rect l="l" t="t" r="r" b="b"/>
             <a:pathLst>
-              <a:path w="442700" h="55338">
+              <a:path w="447822" h="55978">
                 <a:moveTo>
-                  <a:pt x="0" y="55338"/>
+                  <a:pt x="0" y="55978"/>
                 </a:moveTo>
                 <a:lnTo>
-                  <a:pt x="442700" y="55338"/>
+                  <a:pt x="447822" y="55978"/>
                 </a:lnTo>
                 <a:lnTo>
-                  <a:pt x="442700" y="0"/>
+                  <a:pt x="447822" y="0"/>
                 </a:lnTo>
                 <a:lnTo>
                   <a:pt x="0" y="0"/>
@@ -3953,8 +3953,8 @@
         </p:nvSpPr>
         <p:spPr>
           <a:xfrm>
-            <a:off x="6597766" y="4027306"/>
-            <a:ext cx="1180534" cy="774725"/>
+            <a:off x="8734923" y="3390763"/>
+            <a:ext cx="447822" cy="55978"/>
           </a:xfrm>
           <a:custGeom>
             <a:avLst/>
@@ -3963,21 +3963,62 @@
             <a:cxnLst/>
             <a:rect l="l" t="t" r="r" b="b"/>
             <a:pathLst>
-              <a:path w="1180534" h="774725">
+              <a:path w="447822" h="55978">
                 <a:moveTo>
-                  <a:pt x="0" y="774725"/>
+                  <a:pt x="0" y="55978"/>
                 </a:moveTo>
                 <a:lnTo>
-                  <a:pt x="1180534" y="774725"/>
+                  <a:pt x="447822" y="55978"/>
                 </a:lnTo>
                 <a:lnTo>
-                  <a:pt x="1180534" y="295133"/>
+                  <a:pt x="447822" y="0"/>
                 </a:lnTo>
                 <a:lnTo>
-                  <a:pt x="590267" y="0"/>
+                  <a:pt x="0" y="0"/>
+                </a:lnTo>
+                <a:close/>
+              </a:path>
+            </a:pathLst>
+          </a:custGeom>
+          <a:solidFill>
+            <a:srgbClr val="FFFFFF"/>
+          </a:solidFill>
+          <a:ln/>
+        </p:spPr>
+      </p:sp>
+      <p:sp>
+        <p:nvSpPr>
+          <p:cNvPr id="14" name="S04-mark30"/>
+          <p:cNvSpPr/>
+          <p:nvPr/>
+        </p:nvSpPr>
+        <p:spPr>
+          <a:xfrm>
+            <a:off x="6757045" y="4051300"/>
+            <a:ext cx="1119554" cy="970280"/>
+          </a:xfrm>
+          <a:custGeom>
+            <a:avLst/>
+            <a:gdLst/>
+            <a:ahLst/>
+            <a:cxnLst/>
+            <a:rect l="l" t="t" r="r" b="b"/>
+            <a:pathLst>
+              <a:path w="1119554" h="970280">
+                <a:moveTo>
+                  <a:pt x="0" y="970280"/>
+                </a:moveTo>
+                <a:lnTo>
+                  <a:pt x="1119554" y="970280"/>
                 </a:lnTo>
                 <a:lnTo>
-                  <a:pt x="0" y="295133"/>
+                  <a:pt x="1119554" y="373185"/>
+                </a:lnTo>
+                <a:lnTo>
+                  <a:pt x="559777" y="0"/>
+                </a:lnTo>
+                <a:lnTo>
+                  <a:pt x="0" y="373185"/>
                 </a:lnTo>
                 <a:close/>
               </a:path>
@@ -3996,14 +4037,14 @@
       </p:sp>
       <p:sp>
         <p:nvSpPr>
-          <p:cNvPr id="14" name="S04-mark30"/>
+          <p:cNvPr id="15" name="S04-mark31"/>
           <p:cNvSpPr/>
           <p:nvPr/>
         </p:nvSpPr>
         <p:spPr>
           <a:xfrm>
-            <a:off x="8294784" y="4064198"/>
-            <a:ext cx="1475667" cy="737834"/>
+            <a:off x="8249783" y="3976663"/>
+            <a:ext cx="1418102" cy="1044917"/>
           </a:xfrm>
           <a:custGeom>
             <a:avLst/>
@@ -4012,15 +4053,15 @@
             <a:cxnLst/>
             <a:rect l="l" t="t" r="r" b="b"/>
             <a:pathLst>
-              <a:path w="1475667" h="737834">
+              <a:path w="1418102" h="1044917">
                 <a:moveTo>
-                  <a:pt x="0" y="737834"/>
+                  <a:pt x="0" y="1044917"/>
                 </a:moveTo>
                 <a:lnTo>
-                  <a:pt x="1475667" y="737834"/>
+                  <a:pt x="1418102" y="1044917"/>
                 </a:lnTo>
                 <a:lnTo>
-                  <a:pt x="1475667" y="0"/>
+                  <a:pt x="1418102" y="0"/>
                 </a:lnTo>
                 <a:lnTo>
                   <a:pt x="0" y="0"/>
@@ -4042,14 +4083,14 @@
       </p:sp>
       <p:sp>
         <p:nvSpPr>
-          <p:cNvPr id="15" name="S04-mark31"/>
+          <p:cNvPr id="16" name="S04-mark32"/>
           <p:cNvSpPr/>
           <p:nvPr/>
         </p:nvSpPr>
         <p:spPr>
           <a:xfrm>
-            <a:off x="9991801" y="4064198"/>
-            <a:ext cx="1475667" cy="737834"/>
+            <a:off x="9891796" y="3976663"/>
+            <a:ext cx="1418102" cy="1044917"/>
           </a:xfrm>
           <a:custGeom>
             <a:avLst/>
@@ -4058,15 +4099,15 @@
             <a:cxnLst/>
             <a:rect l="l" t="t" r="r" b="b"/>
             <a:pathLst>
-              <a:path w="1475667" h="737834">
+              <a:path w="1418102" h="1044917">
                 <a:moveTo>
-                  <a:pt x="0" y="737834"/>
+                  <a:pt x="0" y="1044917"/>
                 </a:moveTo>
                 <a:lnTo>
-                  <a:pt x="1475667" y="737834"/>
+                  <a:pt x="1418102" y="1044917"/>
                 </a:lnTo>
                 <a:lnTo>
-                  <a:pt x="1475667" y="0"/>
+                  <a:pt x="1418102" y="0"/>
                 </a:lnTo>
                 <a:lnTo>
                   <a:pt x="0" y="0"/>
@@ -4088,14 +4129,14 @@
       </p:sp>
       <p:sp>
         <p:nvSpPr>
-          <p:cNvPr id="16" name="S04-mark32"/>
+          <p:cNvPr id="17" name="S04-mark33"/>
           <p:cNvSpPr/>
           <p:nvPr/>
         </p:nvSpPr>
         <p:spPr>
           <a:xfrm>
-            <a:off x="6560874" y="2440964"/>
-            <a:ext cx="368917" cy="368917"/>
+            <a:off x="6682408" y="2222695"/>
+            <a:ext cx="373185" cy="373185"/>
           </a:xfrm>
           <a:prstGeom prst="ellipse">
             <a:avLst/>
@@ -4113,14 +4154,14 @@
       </p:sp>
       <p:sp>
         <p:nvSpPr>
-          <p:cNvPr id="17" name="S04-mark33"/>
+          <p:cNvPr id="18" name="S04-mark34"/>
           <p:cNvSpPr/>
           <p:nvPr/>
         </p:nvSpPr>
         <p:spPr>
           <a:xfrm>
-            <a:off x="6966683" y="2404072"/>
-            <a:ext cx="368917" cy="368917"/>
+            <a:off x="7092911" y="2185377"/>
+            <a:ext cx="373185" cy="373185"/>
           </a:xfrm>
           <a:prstGeom prst="ellipse">
             <a:avLst/>
@@ -4138,14 +4179,14 @@
       </p:sp>
       <p:sp>
         <p:nvSpPr>
-          <p:cNvPr id="18" name="S04-mark34"/>
+          <p:cNvPr id="19" name="S04-mark35"/>
           <p:cNvSpPr/>
           <p:nvPr/>
         </p:nvSpPr>
         <p:spPr>
           <a:xfrm>
-            <a:off x="6708441" y="2846772"/>
-            <a:ext cx="368917" cy="368917"/>
+            <a:off x="7503414" y="2222695"/>
+            <a:ext cx="373185" cy="373185"/>
           </a:xfrm>
           <a:prstGeom prst="ellipse">
             <a:avLst/>
@@ -4163,13 +4204,38 @@
       </p:sp>
       <p:sp>
         <p:nvSpPr>
-          <p:cNvPr id="19" name="S04-label36"/>
+          <p:cNvPr id="20" name="S04-mark36"/>
+          <p:cNvSpPr/>
+          <p:nvPr/>
+        </p:nvSpPr>
+        <p:spPr>
+          <a:xfrm>
+            <a:off x="6719726" y="2670517"/>
+            <a:ext cx="373185" cy="373185"/>
+          </a:xfrm>
+          <a:prstGeom prst="ellipse">
+            <a:avLst/>
+          </a:prstGeom>
+          <a:solidFill>
+            <a:srgbClr val="2A9D8F"/>
+          </a:solidFill>
+          <a:ln w="28575">
+            <a:solidFill>
+              <a:srgbClr val="1F2937"/>
+            </a:solidFill>
+            <a:prstDash val="solid"/>
+          </a:ln>
+        </p:spPr>
+      </p:sp>
+      <p:sp>
+        <p:nvSpPr>
+          <p:cNvPr id="21" name="S04-label38"/>
           <p:cNvSpPr txBox="1"/>
           <p:nvPr/>
         </p:nvSpPr>
         <p:spPr>
           <a:xfrm>
-            <a:off x="7289165" y="2603505"/>
+            <a:off x="7199591" y="2762690"/>
             <a:ext cx="756920" cy="412750"/>
           </a:xfrm>
           <a:prstGeom prst="rect">
@@ -4202,13 +4268,13 @@
       </p:sp>
       <p:sp>
         <p:nvSpPr>
-          <p:cNvPr id="20" name="S04-label38"/>
+          <p:cNvPr id="22" name="S04-label40"/>
           <p:cNvSpPr txBox="1"/>
           <p:nvPr/>
         </p:nvSpPr>
         <p:spPr>
           <a:xfrm>
-            <a:off x="8654157" y="2603505"/>
+            <a:off x="8580374" y="2464142"/>
             <a:ext cx="756920" cy="412750"/>
           </a:xfrm>
           <a:prstGeom prst="rect">
@@ -4241,13 +4307,13 @@
       </p:sp>
       <p:sp>
         <p:nvSpPr>
-          <p:cNvPr id="21" name="S04-label40"/>
+          <p:cNvPr id="23" name="S04-label42"/>
           <p:cNvSpPr txBox="1"/>
           <p:nvPr/>
         </p:nvSpPr>
         <p:spPr>
           <a:xfrm>
-            <a:off x="10189377" y="2603505"/>
+            <a:off x="10060588" y="2464142"/>
             <a:ext cx="1080516" cy="412750"/>
           </a:xfrm>
           <a:prstGeom prst="rect">
@@ -4280,13 +4346,13 @@
       </p:sp>
       <p:sp>
         <p:nvSpPr>
-          <p:cNvPr id="22" name="S04-label42"/>
+          <p:cNvPr id="24" name="S04-label44"/>
           <p:cNvSpPr txBox="1"/>
           <p:nvPr/>
         </p:nvSpPr>
         <p:spPr>
           <a:xfrm>
-            <a:off x="7166937" y="3510148"/>
+            <a:off x="7112547" y="3436791"/>
             <a:ext cx="632460" cy="333375"/>
           </a:xfrm>
           <a:prstGeom prst="rect">
@@ -4319,13 +4385,13 @@
       </p:sp>
       <p:sp>
         <p:nvSpPr>
-          <p:cNvPr id="23" name="S04-label44"/>
+          <p:cNvPr id="25" name="S04-label46"/>
           <p:cNvSpPr txBox="1"/>
           <p:nvPr/>
         </p:nvSpPr>
         <p:spPr>
           <a:xfrm>
-            <a:off x="10118271" y="3510148"/>
+            <a:off x="10098024" y="3436791"/>
             <a:ext cx="632460" cy="333375"/>
           </a:xfrm>
           <a:prstGeom prst="rect">
@@ -4358,13 +4424,13 @@
       </p:sp>
       <p:sp>
         <p:nvSpPr>
-          <p:cNvPr id="24" name="S04-label46"/>
+          <p:cNvPr id="26" name="S04-label48"/>
           <p:cNvSpPr txBox="1"/>
           <p:nvPr/>
         </p:nvSpPr>
         <p:spPr>
           <a:xfrm>
-            <a:off x="6971371" y="4355861"/>
+            <a:off x="7100160" y="4516657"/>
             <a:ext cx="433324" cy="412750"/>
           </a:xfrm>
           <a:prstGeom prst="rect">
@@ -4397,13 +4463,13 @@
       </p:sp>
       <p:sp>
         <p:nvSpPr>
-          <p:cNvPr id="25" name="S04-label48"/>
+          <p:cNvPr id="27" name="S04-label50"/>
           <p:cNvSpPr txBox="1"/>
           <p:nvPr/>
         </p:nvSpPr>
         <p:spPr>
           <a:xfrm>
-            <a:off x="8492359" y="4226740"/>
+            <a:off x="8418576" y="4292747"/>
             <a:ext cx="1080516" cy="412750"/>
           </a:xfrm>
           <a:prstGeom prst="rect">
@@ -4436,14 +4502,14 @@
       </p:sp>
       <p:sp>
         <p:nvSpPr>
-          <p:cNvPr id="26" name="S04-label50"/>
+          <p:cNvPr id="28" name="S04-label52"/>
           <p:cNvSpPr txBox="1"/>
           <p:nvPr/>
         </p:nvSpPr>
         <p:spPr>
           <a:xfrm>
-            <a:off x="10242717" y="4099740"/>
-            <a:ext cx="973836" cy="666750"/>
+            <a:off x="10011058" y="4086372"/>
+            <a:ext cx="1179576" cy="825500"/>
           </a:xfrm>
           <a:prstGeom prst="rect">
             <a:avLst/>
@@ -4459,7 +4525,7 @@
               <a:buNone/>
             </a:pPr>
             <a:r>
-              <a:rPr lang="ko-KR" altLang="en-US" sz="2100" b="1" dirty="0">
+              <a:rPr lang="ko-KR" altLang="en-US" sz="2600" b="1" dirty="0">
                 <a:solidFill>
                   <a:srgbClr val="1F2937"/>
                 </a:solidFill>
@@ -4469,14 +4535,14 @@
               </a:rPr>
               <a:t>쓰레기</a:t>
             </a:r>
-            <a:endParaRPr lang="ko-KR" sz="2100" dirty="0"/>
+            <a:endParaRPr lang="ko-KR" sz="2600" dirty="0"/>
           </a:p>
           <a:p>
             <a:pPr eaLnBrk="0" algn="ctr" indent="0" marL="0">
               <a:buNone/>
             </a:pPr>
             <a:r>
-              <a:rPr lang="ko-KR" altLang="en-US" sz="2100" b="1" dirty="0">
+              <a:rPr lang="ko-KR" altLang="en-US" sz="2600" b="1" dirty="0">
                 <a:solidFill>
                   <a:srgbClr val="1F2937"/>
                 </a:solidFill>
@@ -4486,13 +4552,13 @@
               </a:rPr>
               <a:t>쌓인 곳</a:t>
             </a:r>
-            <a:endParaRPr lang="ko-KR" sz="2100" dirty="0"/>
-          </a:p>
-        </p:txBody>
-      </p:sp>
-      <p:sp>
-        <p:nvSpPr>
-          <p:cNvPr id="27" name="S04-chip51"/>
+            <a:endParaRPr lang="ko-KR" sz="2600" dirty="0"/>
+          </a:p>
+        </p:txBody>
+      </p:sp>
+      <p:sp>
+        <p:nvSpPr>
+          <p:cNvPr id="29" name="S04-chip53"/>
           <p:cNvSpPr txBox="1"/>
           <p:nvPr/>
         </p:nvSpPr>
@@ -4539,7 +4605,7 @@
       </p:sp>
       <p:sp>
         <p:nvSpPr>
-          <p:cNvPr id="28" name="S04-text52"/>
+          <p:cNvPr id="30" name="S04-text54"/>
           <p:cNvSpPr txBox="1"/>
           <p:nvPr/>
         </p:nvSpPr>
@@ -4595,7 +4661,7 @@
       </p:sp>
       <p:sp>
         <p:nvSpPr>
-          <p:cNvPr id="29" name="S04-chip53"/>
+          <p:cNvPr id="31" name="S04-chip55"/>
           <p:cNvSpPr txBox="1"/>
           <p:nvPr/>
         </p:nvSpPr>
@@ -4642,7 +4708,7 @@
       </p:sp>
       <p:sp>
         <p:nvSpPr>
-          <p:cNvPr id="30" name="S04-text54"/>
+          <p:cNvPr id="32" name="S04-text56"/>
           <p:cNvSpPr txBox="1"/>
           <p:nvPr/>
         </p:nvSpPr>
@@ -4698,7 +4764,7 @@
       </p:sp>
       <p:sp>
         <p:nvSpPr>
-          <p:cNvPr id="31" name="S04-chip55"/>
+          <p:cNvPr id="33" name="S04-chip57"/>
           <p:cNvSpPr txBox="1"/>
           <p:nvPr/>
         </p:nvSpPr>
@@ -4745,7 +4811,7 @@
       </p:sp>
       <p:sp>
         <p:nvSpPr>
-          <p:cNvPr id="32" name="S04-text56"/>
+          <p:cNvPr id="34" name="S04-text58"/>
           <p:cNvSpPr txBox="1"/>
           <p:nvPr/>
         </p:nvSpPr>
@@ -4915,7 +4981,7 @@
       </p:sp>
       <p:sp>
         <p:nvSpPr>
-          <p:cNvPr id="3" name="S05-text57"/>
+          <p:cNvPr id="3" name="S05-text59"/>
           <p:cNvSpPr txBox="1"/>
           <p:nvPr/>
         </p:nvSpPr>
@@ -4954,7 +5020,7 @@
       </p:sp>
       <p:sp>
         <p:nvSpPr>
-          <p:cNvPr id="4" name="S05-card58"/>
+          <p:cNvPr id="4" name="S05-card60"/>
           <p:cNvSpPr/>
           <p:nvPr/>
         </p:nvSpPr>
@@ -4981,7 +5047,7 @@
       </p:sp>
       <p:sp>
         <p:nvSpPr>
-          <p:cNvPr id="5" name="S05-cardtext59"/>
+          <p:cNvPr id="5" name="S05-cardtext61"/>
           <p:cNvSpPr txBox="1"/>
           <p:nvPr/>
         </p:nvSpPr>
@@ -5023,7 +5089,7 @@
       </p:sp>
       <p:sp>
         <p:nvSpPr>
-          <p:cNvPr id="6" name="S05-card60"/>
+          <p:cNvPr id="6" name="S05-card62"/>
           <p:cNvSpPr/>
           <p:nvPr/>
         </p:nvSpPr>
@@ -5050,7 +5116,7 @@
       </p:sp>
       <p:sp>
         <p:nvSpPr>
-          <p:cNvPr id="7" name="S05-cardtext61"/>
+          <p:cNvPr id="7" name="S05-cardtext63"/>
           <p:cNvSpPr txBox="1"/>
           <p:nvPr/>
         </p:nvSpPr>
@@ -5112,7 +5178,7 @@
       </p:sp>
       <p:sp>
         <p:nvSpPr>
-          <p:cNvPr id="8" name="S05-card62"/>
+          <p:cNvPr id="8" name="S05-card64"/>
           <p:cNvSpPr/>
           <p:nvPr/>
         </p:nvSpPr>
@@ -5139,7 +5205,7 @@
       </p:sp>
       <p:sp>
         <p:nvSpPr>
-          <p:cNvPr id="9" name="S05-cardtext63"/>
+          <p:cNvPr id="9" name="S05-cardtext65"/>
           <p:cNvSpPr txBox="1"/>
           <p:nvPr/>
         </p:nvSpPr>
@@ -5201,7 +5267,7 @@
       </p:sp>
       <p:sp>
         <p:nvSpPr>
-          <p:cNvPr id="10" name="S05-card64"/>
+          <p:cNvPr id="10" name="S05-card66"/>
           <p:cNvSpPr/>
           <p:nvPr/>
         </p:nvSpPr>
@@ -5228,7 +5294,7 @@
       </p:sp>
       <p:sp>
         <p:nvSpPr>
-          <p:cNvPr id="11" name="S05-cardtext65"/>
+          <p:cNvPr id="11" name="S05-cardtext67"/>
           <p:cNvSpPr txBox="1"/>
           <p:nvPr/>
         </p:nvSpPr>
@@ -5290,7 +5356,7 @@
       </p:sp>
       <p:sp>
         <p:nvSpPr>
-          <p:cNvPr id="12" name="S05-card66"/>
+          <p:cNvPr id="12" name="S05-card68"/>
           <p:cNvSpPr/>
           <p:nvPr/>
         </p:nvSpPr>
@@ -5317,7 +5383,7 @@
       </p:sp>
       <p:sp>
         <p:nvSpPr>
-          <p:cNvPr id="13" name="S05-cardtext67"/>
+          <p:cNvPr id="13" name="S05-cardtext69"/>
           <p:cNvSpPr txBox="1"/>
           <p:nvPr/>
         </p:nvSpPr>
@@ -5493,7 +5559,7 @@
       </p:sp>
       <p:sp>
         <p:nvSpPr>
-          <p:cNvPr id="3" name="S06-text68"/>
+          <p:cNvPr id="3" name="S06-text70"/>
           <p:cNvSpPr txBox="1"/>
           <p:nvPr/>
         </p:nvSpPr>
@@ -5532,7 +5598,7 @@
       </p:sp>
       <p:sp>
         <p:nvSpPr>
-          <p:cNvPr id="4" name="S06-card69"/>
+          <p:cNvPr id="4" name="S06-card71"/>
           <p:cNvSpPr/>
           <p:nvPr/>
         </p:nvSpPr>
@@ -5559,7 +5625,7 @@
       </p:sp>
       <p:sp>
         <p:nvSpPr>
-          <p:cNvPr id="5" name="S06-cardtext70"/>
+          <p:cNvPr id="5" name="S06-cardtext72"/>
           <p:cNvSpPr txBox="1"/>
           <p:nvPr/>
         </p:nvSpPr>
@@ -5601,14 +5667,14 @@
       </p:sp>
       <p:sp>
         <p:nvSpPr>
-          <p:cNvPr id="6" name="S06-figure71" descr="지어낸 하늘 마을 지도. 위쪽에 나무 세 그루가 있는 공원, 학교, 공사장이 있고, 가운데로 횡단보도가 있는 큰길이 지나며, 아래쪽에 집, 놀이터, 쓰레기 쌓인 곳이 있다."/>
+          <p:cNvPr id="6" name="S06-figure73" descr="지어낸 하늘 마을 지도. 위쪽에 나무 네 그루가 있는 공원, 학교, 공사장이 있고, 가운데로 횡단보도가 있는 큰길이 지나며, 아래쪽에 집, 놀이터, 쓰레기 쌓인 곳이 있다."/>
           <p:cNvSpPr/>
           <p:nvPr/>
         </p:nvSpPr>
         <p:spPr>
           <a:xfrm>
-            <a:off x="6450199" y="2330289"/>
-            <a:ext cx="1623234" cy="959184"/>
+            <a:off x="6607771" y="2110740"/>
+            <a:ext cx="1418102" cy="1119554"/>
           </a:xfrm>
           <a:custGeom>
             <a:avLst/>
@@ -5617,15 +5683,15 @@
             <a:cxnLst/>
             <a:rect l="l" t="t" r="r" b="b"/>
             <a:pathLst>
-              <a:path w="1623234" h="959184">
+              <a:path w="1418102" h="1119554">
                 <a:moveTo>
-                  <a:pt x="0" y="959184"/>
+                  <a:pt x="0" y="1119554"/>
                 </a:moveTo>
                 <a:lnTo>
-                  <a:pt x="1623234" y="959184"/>
+                  <a:pt x="1418102" y="1119554"/>
                 </a:lnTo>
                 <a:lnTo>
-                  <a:pt x="1623234" y="0"/>
+                  <a:pt x="1418102" y="0"/>
                 </a:lnTo>
                 <a:lnTo>
                   <a:pt x="0" y="0"/>
@@ -5647,14 +5713,14 @@
       </p:sp>
       <p:sp>
         <p:nvSpPr>
-          <p:cNvPr id="7" name="S06-mark72"/>
+          <p:cNvPr id="7" name="S06-mark74"/>
           <p:cNvSpPr/>
           <p:nvPr/>
         </p:nvSpPr>
         <p:spPr>
           <a:xfrm>
-            <a:off x="8294784" y="2330289"/>
-            <a:ext cx="1475667" cy="959184"/>
+            <a:off x="8249783" y="2110740"/>
+            <a:ext cx="1418102" cy="1119554"/>
           </a:xfrm>
           <a:custGeom>
             <a:avLst/>
@@ -5663,15 +5729,15 @@
             <a:cxnLst/>
             <a:rect l="l" t="t" r="r" b="b"/>
             <a:pathLst>
-              <a:path w="1475667" h="959184">
+              <a:path w="1418102" h="1119554">
                 <a:moveTo>
-                  <a:pt x="0" y="959184"/>
+                  <a:pt x="0" y="1119554"/>
                 </a:moveTo>
                 <a:lnTo>
-                  <a:pt x="1475667" y="959184"/>
+                  <a:pt x="1418102" y="1119554"/>
                 </a:lnTo>
                 <a:lnTo>
-                  <a:pt x="1475667" y="0"/>
+                  <a:pt x="1418102" y="0"/>
                 </a:lnTo>
                 <a:lnTo>
                   <a:pt x="0" y="0"/>
@@ -5693,14 +5759,14 @@
       </p:sp>
       <p:sp>
         <p:nvSpPr>
-          <p:cNvPr id="8" name="S06-mark73"/>
+          <p:cNvPr id="8" name="S06-mark75"/>
           <p:cNvSpPr/>
           <p:nvPr/>
         </p:nvSpPr>
         <p:spPr>
           <a:xfrm>
-            <a:off x="9991801" y="2330289"/>
-            <a:ext cx="1475667" cy="959184"/>
+            <a:off x="9891796" y="2110740"/>
+            <a:ext cx="1418102" cy="1119554"/>
           </a:xfrm>
           <a:custGeom>
             <a:avLst/>
@@ -5709,15 +5775,15 @@
             <a:cxnLst/>
             <a:rect l="l" t="t" r="r" b="b"/>
             <a:pathLst>
-              <a:path w="1475667" h="959184">
+              <a:path w="1418102" h="1119554">
                 <a:moveTo>
-                  <a:pt x="0" y="959184"/>
+                  <a:pt x="0" y="1119554"/>
                 </a:moveTo>
                 <a:lnTo>
-                  <a:pt x="1475667" y="959184"/>
+                  <a:pt x="1418102" y="1119554"/>
                 </a:lnTo>
                 <a:lnTo>
-                  <a:pt x="1475667" y="0"/>
+                  <a:pt x="1418102" y="0"/>
                 </a:lnTo>
                 <a:lnTo>
                   <a:pt x="0" y="0"/>
@@ -5739,14 +5805,14 @@
       </p:sp>
       <p:sp>
         <p:nvSpPr>
-          <p:cNvPr id="9" name="S06-mark74"/>
+          <p:cNvPr id="9" name="S06-mark76"/>
           <p:cNvSpPr/>
           <p:nvPr/>
         </p:nvSpPr>
         <p:spPr>
           <a:xfrm>
-            <a:off x="6376416" y="3473931"/>
-            <a:ext cx="5164836" cy="405809"/>
+            <a:off x="6533134" y="3379568"/>
+            <a:ext cx="4851400" cy="447822"/>
           </a:xfrm>
           <a:custGeom>
             <a:avLst/>
@@ -5755,15 +5821,15 @@
             <a:cxnLst/>
             <a:rect l="l" t="t" r="r" b="b"/>
             <a:pathLst>
-              <a:path w="5164836" h="405809">
+              <a:path w="4851400" h="447822">
                 <a:moveTo>
-                  <a:pt x="0" y="405809"/>
+                  <a:pt x="0" y="447822"/>
                 </a:moveTo>
                 <a:lnTo>
-                  <a:pt x="5164836" y="405809"/>
+                  <a:pt x="4851400" y="447822"/>
                 </a:lnTo>
                 <a:lnTo>
-                  <a:pt x="5164836" y="0"/>
+                  <a:pt x="4851400" y="0"/>
                 </a:lnTo>
                 <a:lnTo>
                   <a:pt x="0" y="0"/>
@@ -5780,14 +5846,14 @@
       </p:sp>
       <p:sp>
         <p:nvSpPr>
-          <p:cNvPr id="10" name="S06-mark75"/>
+          <p:cNvPr id="10" name="S06-mark77"/>
           <p:cNvSpPr/>
           <p:nvPr/>
         </p:nvSpPr>
         <p:spPr>
           <a:xfrm>
-            <a:off x="8811267" y="3787510"/>
-            <a:ext cx="442700" cy="55338"/>
+            <a:off x="8734923" y="3726629"/>
+            <a:ext cx="447822" cy="55978"/>
           </a:xfrm>
           <a:custGeom>
             <a:avLst/>
@@ -5796,15 +5862,15 @@
             <a:cxnLst/>
             <a:rect l="l" t="t" r="r" b="b"/>
             <a:pathLst>
-              <a:path w="442700" h="55338">
+              <a:path w="447822" h="55978">
                 <a:moveTo>
-                  <a:pt x="0" y="55338"/>
+                  <a:pt x="0" y="55978"/>
                 </a:moveTo>
                 <a:lnTo>
-                  <a:pt x="442700" y="55338"/>
+                  <a:pt x="447822" y="55978"/>
                 </a:lnTo>
                 <a:lnTo>
-                  <a:pt x="442700" y="0"/>
+                  <a:pt x="447822" y="0"/>
                 </a:lnTo>
                 <a:lnTo>
                   <a:pt x="0" y="0"/>
@@ -5821,14 +5887,14 @@
       </p:sp>
       <p:sp>
         <p:nvSpPr>
-          <p:cNvPr id="11" name="S06-mark76"/>
+          <p:cNvPr id="11" name="S06-mark78"/>
           <p:cNvSpPr/>
           <p:nvPr/>
         </p:nvSpPr>
         <p:spPr>
           <a:xfrm>
-            <a:off x="8811267" y="3676835"/>
-            <a:ext cx="442700" cy="55338"/>
+            <a:off x="8734923" y="3614674"/>
+            <a:ext cx="447822" cy="55978"/>
           </a:xfrm>
           <a:custGeom>
             <a:avLst/>
@@ -5837,15 +5903,15 @@
             <a:cxnLst/>
             <a:rect l="l" t="t" r="r" b="b"/>
             <a:pathLst>
-              <a:path w="442700" h="55338">
+              <a:path w="447822" h="55978">
                 <a:moveTo>
-                  <a:pt x="0" y="55338"/>
+                  <a:pt x="0" y="55978"/>
                 </a:moveTo>
                 <a:lnTo>
-                  <a:pt x="442700" y="55338"/>
+                  <a:pt x="447822" y="55978"/>
                 </a:lnTo>
                 <a:lnTo>
-                  <a:pt x="442700" y="0"/>
+                  <a:pt x="447822" y="0"/>
                 </a:lnTo>
                 <a:lnTo>
                   <a:pt x="0" y="0"/>
@@ -5862,14 +5928,14 @@
       </p:sp>
       <p:sp>
         <p:nvSpPr>
-          <p:cNvPr id="12" name="S06-mark77"/>
+          <p:cNvPr id="12" name="S06-mark79"/>
           <p:cNvSpPr/>
           <p:nvPr/>
         </p:nvSpPr>
         <p:spPr>
           <a:xfrm>
-            <a:off x="8811267" y="3566160"/>
-            <a:ext cx="442700" cy="55338"/>
+            <a:off x="8734923" y="3502719"/>
+            <a:ext cx="447822" cy="55978"/>
           </a:xfrm>
           <a:custGeom>
             <a:avLst/>
@@ -5878,15 +5944,15 @@
             <a:cxnLst/>
             <a:rect l="l" t="t" r="r" b="b"/>
             <a:pathLst>
-              <a:path w="442700" h="55338">
+              <a:path w="447822" h="55978">
                 <a:moveTo>
-                  <a:pt x="0" y="55338"/>
+                  <a:pt x="0" y="55978"/>
                 </a:moveTo>
                 <a:lnTo>
-                  <a:pt x="442700" y="55338"/>
+                  <a:pt x="447822" y="55978"/>
                 </a:lnTo>
                 <a:lnTo>
-                  <a:pt x="442700" y="0"/>
+                  <a:pt x="447822" y="0"/>
                 </a:lnTo>
                 <a:lnTo>
                   <a:pt x="0" y="0"/>
@@ -5903,14 +5969,14 @@
       </p:sp>
       <p:sp>
         <p:nvSpPr>
-          <p:cNvPr id="13" name="S06-mark78"/>
+          <p:cNvPr id="13" name="S06-mark80"/>
           <p:cNvSpPr/>
           <p:nvPr/>
         </p:nvSpPr>
         <p:spPr>
           <a:xfrm>
-            <a:off x="6597766" y="4027306"/>
-            <a:ext cx="1180534" cy="774725"/>
+            <a:off x="8734923" y="3390763"/>
+            <a:ext cx="447822" cy="55978"/>
           </a:xfrm>
           <a:custGeom>
             <a:avLst/>
@@ -5919,21 +5985,62 @@
             <a:cxnLst/>
             <a:rect l="l" t="t" r="r" b="b"/>
             <a:pathLst>
-              <a:path w="1180534" h="774725">
+              <a:path w="447822" h="55978">
                 <a:moveTo>
-                  <a:pt x="0" y="774725"/>
+                  <a:pt x="0" y="55978"/>
                 </a:moveTo>
                 <a:lnTo>
-                  <a:pt x="1180534" y="774725"/>
+                  <a:pt x="447822" y="55978"/>
                 </a:lnTo>
                 <a:lnTo>
-                  <a:pt x="1180534" y="295133"/>
+                  <a:pt x="447822" y="0"/>
                 </a:lnTo>
                 <a:lnTo>
-                  <a:pt x="590267" y="0"/>
+                  <a:pt x="0" y="0"/>
+                </a:lnTo>
+                <a:close/>
+              </a:path>
+            </a:pathLst>
+          </a:custGeom>
+          <a:solidFill>
+            <a:srgbClr val="FFFFFF"/>
+          </a:solidFill>
+          <a:ln/>
+        </p:spPr>
+      </p:sp>
+      <p:sp>
+        <p:nvSpPr>
+          <p:cNvPr id="14" name="S06-mark81"/>
+          <p:cNvSpPr/>
+          <p:nvPr/>
+        </p:nvSpPr>
+        <p:spPr>
+          <a:xfrm>
+            <a:off x="6757045" y="4051300"/>
+            <a:ext cx="1119554" cy="970280"/>
+          </a:xfrm>
+          <a:custGeom>
+            <a:avLst/>
+            <a:gdLst/>
+            <a:ahLst/>
+            <a:cxnLst/>
+            <a:rect l="l" t="t" r="r" b="b"/>
+            <a:pathLst>
+              <a:path w="1119554" h="970280">
+                <a:moveTo>
+                  <a:pt x="0" y="970280"/>
+                </a:moveTo>
+                <a:lnTo>
+                  <a:pt x="1119554" y="970280"/>
                 </a:lnTo>
                 <a:lnTo>
-                  <a:pt x="0" y="295133"/>
+                  <a:pt x="1119554" y="373185"/>
+                </a:lnTo>
+                <a:lnTo>
+                  <a:pt x="559777" y="0"/>
+                </a:lnTo>
+                <a:lnTo>
+                  <a:pt x="0" y="373185"/>
                 </a:lnTo>
                 <a:close/>
               </a:path>
@@ -5952,14 +6059,14 @@
       </p:sp>
       <p:sp>
         <p:nvSpPr>
-          <p:cNvPr id="14" name="S06-mark79"/>
+          <p:cNvPr id="15" name="S06-mark82"/>
           <p:cNvSpPr/>
           <p:nvPr/>
         </p:nvSpPr>
         <p:spPr>
           <a:xfrm>
-            <a:off x="8294784" y="4064198"/>
-            <a:ext cx="1475667" cy="737834"/>
+            <a:off x="8249783" y="3976663"/>
+            <a:ext cx="1418102" cy="1044917"/>
           </a:xfrm>
           <a:custGeom>
             <a:avLst/>
@@ -5968,15 +6075,15 @@
             <a:cxnLst/>
             <a:rect l="l" t="t" r="r" b="b"/>
             <a:pathLst>
-              <a:path w="1475667" h="737834">
+              <a:path w="1418102" h="1044917">
                 <a:moveTo>
-                  <a:pt x="0" y="737834"/>
+                  <a:pt x="0" y="1044917"/>
                 </a:moveTo>
                 <a:lnTo>
-                  <a:pt x="1475667" y="737834"/>
+                  <a:pt x="1418102" y="1044917"/>
                 </a:lnTo>
                 <a:lnTo>
-                  <a:pt x="1475667" y="0"/>
+                  <a:pt x="1418102" y="0"/>
                 </a:lnTo>
                 <a:lnTo>
                   <a:pt x="0" y="0"/>
@@ -5998,14 +6105,14 @@
       </p:sp>
       <p:sp>
         <p:nvSpPr>
-          <p:cNvPr id="15" name="S06-mark80"/>
+          <p:cNvPr id="16" name="S06-mark83"/>
           <p:cNvSpPr/>
           <p:nvPr/>
         </p:nvSpPr>
         <p:spPr>
           <a:xfrm>
-            <a:off x="9991801" y="4064198"/>
-            <a:ext cx="1475667" cy="737834"/>
+            <a:off x="9891796" y="3976663"/>
+            <a:ext cx="1418102" cy="1044917"/>
           </a:xfrm>
           <a:custGeom>
             <a:avLst/>
@@ -6014,15 +6121,15 @@
             <a:cxnLst/>
             <a:rect l="l" t="t" r="r" b="b"/>
             <a:pathLst>
-              <a:path w="1475667" h="737834">
+              <a:path w="1418102" h="1044917">
                 <a:moveTo>
-                  <a:pt x="0" y="737834"/>
+                  <a:pt x="0" y="1044917"/>
                 </a:moveTo>
                 <a:lnTo>
-                  <a:pt x="1475667" y="737834"/>
+                  <a:pt x="1418102" y="1044917"/>
                 </a:lnTo>
                 <a:lnTo>
-                  <a:pt x="1475667" y="0"/>
+                  <a:pt x="1418102" y="0"/>
                 </a:lnTo>
                 <a:lnTo>
                   <a:pt x="0" y="0"/>
@@ -6044,14 +6151,14 @@
       </p:sp>
       <p:sp>
         <p:nvSpPr>
-          <p:cNvPr id="16" name="S06-mark81"/>
+          <p:cNvPr id="17" name="S06-mark84"/>
           <p:cNvSpPr/>
           <p:nvPr/>
         </p:nvSpPr>
         <p:spPr>
           <a:xfrm>
-            <a:off x="6560874" y="2440964"/>
-            <a:ext cx="368917" cy="368917"/>
+            <a:off x="6682408" y="2222695"/>
+            <a:ext cx="373185" cy="373185"/>
           </a:xfrm>
           <a:prstGeom prst="ellipse">
             <a:avLst/>
@@ -6069,14 +6176,14 @@
       </p:sp>
       <p:sp>
         <p:nvSpPr>
-          <p:cNvPr id="17" name="S06-mark82"/>
+          <p:cNvPr id="18" name="S06-mark85"/>
           <p:cNvSpPr/>
           <p:nvPr/>
         </p:nvSpPr>
         <p:spPr>
           <a:xfrm>
-            <a:off x="6966683" y="2404072"/>
-            <a:ext cx="368917" cy="368917"/>
+            <a:off x="7092911" y="2185377"/>
+            <a:ext cx="373185" cy="373185"/>
           </a:xfrm>
           <a:prstGeom prst="ellipse">
             <a:avLst/>
@@ -6094,14 +6201,14 @@
       </p:sp>
       <p:sp>
         <p:nvSpPr>
-          <p:cNvPr id="18" name="S06-mark83"/>
+          <p:cNvPr id="19" name="S06-mark86"/>
           <p:cNvSpPr/>
           <p:nvPr/>
         </p:nvSpPr>
         <p:spPr>
           <a:xfrm>
-            <a:off x="6708441" y="2846772"/>
-            <a:ext cx="368917" cy="368917"/>
+            <a:off x="7503414" y="2222695"/>
+            <a:ext cx="373185" cy="373185"/>
           </a:xfrm>
           <a:prstGeom prst="ellipse">
             <a:avLst/>
@@ -6119,13 +6226,38 @@
       </p:sp>
       <p:sp>
         <p:nvSpPr>
-          <p:cNvPr id="19" name="S06-label85"/>
+          <p:cNvPr id="20" name="S06-mark87"/>
+          <p:cNvSpPr/>
+          <p:nvPr/>
+        </p:nvSpPr>
+        <p:spPr>
+          <a:xfrm>
+            <a:off x="6719726" y="2670517"/>
+            <a:ext cx="373185" cy="373185"/>
+          </a:xfrm>
+          <a:prstGeom prst="ellipse">
+            <a:avLst/>
+          </a:prstGeom>
+          <a:solidFill>
+            <a:srgbClr val="2A9D8F"/>
+          </a:solidFill>
+          <a:ln w="28575">
+            <a:solidFill>
+              <a:srgbClr val="1F2937"/>
+            </a:solidFill>
+            <a:prstDash val="solid"/>
+          </a:ln>
+        </p:spPr>
+      </p:sp>
+      <p:sp>
+        <p:nvSpPr>
+          <p:cNvPr id="21" name="S06-label89"/>
           <p:cNvSpPr txBox="1"/>
           <p:nvPr/>
         </p:nvSpPr>
         <p:spPr>
           <a:xfrm>
-            <a:off x="7289165" y="2603505"/>
+            <a:off x="7199591" y="2762690"/>
             <a:ext cx="756920" cy="412750"/>
           </a:xfrm>
           <a:prstGeom prst="rect">
@@ -6158,13 +6290,13 @@
       </p:sp>
       <p:sp>
         <p:nvSpPr>
-          <p:cNvPr id="20" name="S06-label87"/>
+          <p:cNvPr id="22" name="S06-label91"/>
           <p:cNvSpPr txBox="1"/>
           <p:nvPr/>
         </p:nvSpPr>
         <p:spPr>
           <a:xfrm>
-            <a:off x="8654157" y="2603505"/>
+            <a:off x="8580374" y="2464142"/>
             <a:ext cx="756920" cy="412750"/>
           </a:xfrm>
           <a:prstGeom prst="rect">
@@ -6197,13 +6329,13 @@
       </p:sp>
       <p:sp>
         <p:nvSpPr>
-          <p:cNvPr id="21" name="S06-label89"/>
+          <p:cNvPr id="23" name="S06-label93"/>
           <p:cNvSpPr txBox="1"/>
           <p:nvPr/>
         </p:nvSpPr>
         <p:spPr>
           <a:xfrm>
-            <a:off x="10189377" y="2603505"/>
+            <a:off x="10060588" y="2464142"/>
             <a:ext cx="1080516" cy="412750"/>
           </a:xfrm>
           <a:prstGeom prst="rect">
@@ -6236,13 +6368,13 @@
       </p:sp>
       <p:sp>
         <p:nvSpPr>
-          <p:cNvPr id="22" name="S06-label91"/>
+          <p:cNvPr id="24" name="S06-label95"/>
           <p:cNvSpPr txBox="1"/>
           <p:nvPr/>
         </p:nvSpPr>
         <p:spPr>
           <a:xfrm>
-            <a:off x="7166937" y="3510148"/>
+            <a:off x="7112547" y="3436791"/>
             <a:ext cx="632460" cy="333375"/>
           </a:xfrm>
           <a:prstGeom prst="rect">
@@ -6275,13 +6407,13 @@
       </p:sp>
       <p:sp>
         <p:nvSpPr>
-          <p:cNvPr id="23" name="S06-label93"/>
+          <p:cNvPr id="25" name="S06-label97"/>
           <p:cNvSpPr txBox="1"/>
           <p:nvPr/>
         </p:nvSpPr>
         <p:spPr>
           <a:xfrm>
-            <a:off x="10118271" y="3510148"/>
+            <a:off x="10098024" y="3436791"/>
             <a:ext cx="632460" cy="333375"/>
           </a:xfrm>
           <a:prstGeom prst="rect">
@@ -6314,13 +6446,13 @@
       </p:sp>
       <p:sp>
         <p:nvSpPr>
-          <p:cNvPr id="24" name="S06-label95"/>
+          <p:cNvPr id="26" name="S06-label99"/>
           <p:cNvSpPr txBox="1"/>
           <p:nvPr/>
         </p:nvSpPr>
         <p:spPr>
           <a:xfrm>
-            <a:off x="6971371" y="4355861"/>
+            <a:off x="7100160" y="4516657"/>
             <a:ext cx="433324" cy="412750"/>
           </a:xfrm>
           <a:prstGeom prst="rect">
@@ -6353,13 +6485,13 @@
       </p:sp>
       <p:sp>
         <p:nvSpPr>
-          <p:cNvPr id="25" name="S06-label97"/>
+          <p:cNvPr id="27" name="S06-label101"/>
           <p:cNvSpPr txBox="1"/>
           <p:nvPr/>
         </p:nvSpPr>
         <p:spPr>
           <a:xfrm>
-            <a:off x="8492359" y="4226740"/>
+            <a:off x="8418576" y="4292747"/>
             <a:ext cx="1080516" cy="412750"/>
           </a:xfrm>
           <a:prstGeom prst="rect">
@@ -6392,14 +6524,14 @@
       </p:sp>
       <p:sp>
         <p:nvSpPr>
-          <p:cNvPr id="26" name="S06-label99"/>
+          <p:cNvPr id="28" name="S06-label103"/>
           <p:cNvSpPr txBox="1"/>
           <p:nvPr/>
         </p:nvSpPr>
         <p:spPr>
           <a:xfrm>
-            <a:off x="10242717" y="4099740"/>
-            <a:ext cx="973836" cy="666750"/>
+            <a:off x="10011058" y="4086372"/>
+            <a:ext cx="1179576" cy="825500"/>
           </a:xfrm>
           <a:prstGeom prst="rect">
             <a:avLst/>
@@ -6415,7 +6547,7 @@
               <a:buNone/>
             </a:pPr>
             <a:r>
-              <a:rPr lang="ko-KR" altLang="en-US" sz="2100" b="1" dirty="0">
+              <a:rPr lang="ko-KR" altLang="en-US" sz="2600" b="1" dirty="0">
                 <a:solidFill>
                   <a:srgbClr val="1F2937"/>
                 </a:solidFill>
@@ -6425,14 +6557,14 @@
               </a:rPr>
               <a:t>쓰레기</a:t>
             </a:r>
-            <a:endParaRPr lang="ko-KR" sz="2100" dirty="0"/>
+            <a:endParaRPr lang="ko-KR" sz="2600" dirty="0"/>
           </a:p>
           <a:p>
             <a:pPr eaLnBrk="0" algn="ctr" indent="0" marL="0">
               <a:buNone/>
             </a:pPr>
             <a:r>
-              <a:rPr lang="ko-KR" altLang="en-US" sz="2100" b="1" dirty="0">
+              <a:rPr lang="ko-KR" altLang="en-US" sz="2600" b="1" dirty="0">
                 <a:solidFill>
                   <a:srgbClr val="1F2937"/>
                 </a:solidFill>
@@ -6442,13 +6574,13 @@
               </a:rPr>
               <a:t>쌓인 곳</a:t>
             </a:r>
-            <a:endParaRPr lang="ko-KR" sz="2100" dirty="0"/>
-          </a:p>
-        </p:txBody>
-      </p:sp>
-      <p:sp>
-        <p:nvSpPr>
-          <p:cNvPr id="27" name="S06-chip100"/>
+            <a:endParaRPr lang="ko-KR" sz="2600" dirty="0"/>
+          </a:p>
+        </p:txBody>
+      </p:sp>
+      <p:sp>
+        <p:nvSpPr>
+          <p:cNvPr id="29" name="S06-chip104"/>
           <p:cNvSpPr txBox="1"/>
           <p:nvPr/>
         </p:nvSpPr>
@@ -6495,7 +6627,7 @@
       </p:sp>
       <p:sp>
         <p:nvSpPr>
-          <p:cNvPr id="28" name="S06-text101"/>
+          <p:cNvPr id="30" name="S06-text105"/>
           <p:cNvSpPr txBox="1"/>
           <p:nvPr/>
         </p:nvSpPr>
@@ -6551,7 +6683,7 @@
       </p:sp>
       <p:sp>
         <p:nvSpPr>
-          <p:cNvPr id="29" name="S06-chip102"/>
+          <p:cNvPr id="31" name="S06-chip106"/>
           <p:cNvSpPr txBox="1"/>
           <p:nvPr/>
         </p:nvSpPr>
@@ -6598,7 +6730,7 @@
       </p:sp>
       <p:sp>
         <p:nvSpPr>
-          <p:cNvPr id="30" name="S06-text103"/>
+          <p:cNvPr id="32" name="S06-text107"/>
           <p:cNvSpPr txBox="1"/>
           <p:nvPr/>
         </p:nvSpPr>
@@ -6654,7 +6786,7 @@
       </p:sp>
       <p:sp>
         <p:nvSpPr>
-          <p:cNvPr id="31" name="S06-chip104"/>
+          <p:cNvPr id="33" name="S06-chip108"/>
           <p:cNvSpPr txBox="1"/>
           <p:nvPr/>
         </p:nvSpPr>
@@ -6701,7 +6833,7 @@
       </p:sp>
       <p:sp>
         <p:nvSpPr>
-          <p:cNvPr id="32" name="S06-text105"/>
+          <p:cNvPr id="34" name="S06-text109"/>
           <p:cNvSpPr txBox="1"/>
           <p:nvPr/>
         </p:nvSpPr>
@@ -6871,7 +7003,7 @@
       </p:sp>
       <p:sp>
         <p:nvSpPr>
-          <p:cNvPr id="3" name="S07-card106"/>
+          <p:cNvPr id="3" name="S07-card110"/>
           <p:cNvSpPr/>
           <p:nvPr/>
         </p:nvSpPr>
@@ -6898,7 +7030,7 @@
       </p:sp>
       <p:sp>
         <p:nvSpPr>
-          <p:cNvPr id="4" name="S07-cardtext107"/>
+          <p:cNvPr id="4" name="S07-cardtext111"/>
           <p:cNvSpPr txBox="1"/>
           <p:nvPr/>
         </p:nvSpPr>
@@ -6960,7 +7092,7 @@
       </p:sp>
       <p:sp>
         <p:nvSpPr>
-          <p:cNvPr id="5" name="S07-card108"/>
+          <p:cNvPr id="5" name="S07-card112"/>
           <p:cNvSpPr/>
           <p:nvPr/>
         </p:nvSpPr>
@@ -6987,7 +7119,7 @@
       </p:sp>
       <p:sp>
         <p:nvSpPr>
-          <p:cNvPr id="6" name="S07-cardtext109"/>
+          <p:cNvPr id="6" name="S07-cardtext113"/>
           <p:cNvSpPr txBox="1"/>
           <p:nvPr/>
         </p:nvSpPr>
@@ -7041,7 +7173,7 @@
                 <a:ea typeface="맑은 고딕" pitchFamily="34" charset="-122"/>
                 <a:cs typeface="맑은 고딕" pitchFamily="34" charset="-120"/>
               </a:rPr>
-              <a:t>☐ 세 가지 넘게 적었어요</a:t>
+              <a:t>☐ 세 가지를 적었어요</a:t>
             </a:r>
             <a:endParaRPr lang="ko-KR" sz="3200" dirty="0"/>
           </a:p>
@@ -7109,13 +7241,13 @@
       </p:sp>
       <p:sp>
         <p:nvSpPr>
-          <p:cNvPr id="7" name="S07-stepno110"/>
+          <p:cNvPr id="7" name="S07-stepno114"/>
           <p:cNvSpPr txBox="1"/>
           <p:nvPr/>
         </p:nvSpPr>
         <p:spPr>
           <a:xfrm>
-            <a:off x="548640" y="1477264"/>
+            <a:off x="548640" y="1653032"/>
             <a:ext cx="548640" cy="548640"/>
           </a:xfrm>
           <a:prstGeom prst="ellipse">
@@ -7154,14 +7286,14 @@
       </p:sp>
       <p:sp>
         <p:nvSpPr>
-          <p:cNvPr id="8" name="S07-text111"/>
+          <p:cNvPr id="8" name="S07-text115"/>
           <p:cNvSpPr txBox="1"/>
           <p:nvPr/>
         </p:nvSpPr>
         <p:spPr>
           <a:xfrm>
-            <a:off x="1325880" y="1431544"/>
-            <a:ext cx="5122012" cy="991616"/>
+            <a:off x="1325880" y="1653032"/>
+            <a:ext cx="5122012" cy="548640"/>
           </a:xfrm>
           <a:prstGeom prst="rect">
             <a:avLst/>
@@ -7185,7 +7317,7 @@
                 <a:ea typeface="맑은 고딕" pitchFamily="34" charset="-122"/>
                 <a:cs typeface="맑은 고딕" pitchFamily="34" charset="-120"/>
               </a:rPr>
-              <a:t>어른과 함께 10분쯤 걸어요.</a:t>
+              <a:t>어른과 함께 걸어요.</a:t>
             </a:r>
             <a:endParaRPr lang="ko-KR" sz="3200" dirty="0"/>
           </a:p>
@@ -7193,13 +7325,13 @@
       </p:sp>
       <p:sp>
         <p:nvSpPr>
-          <p:cNvPr id="9" name="S07-stepno112"/>
+          <p:cNvPr id="9" name="S07-stepno116"/>
           <p:cNvSpPr txBox="1"/>
           <p:nvPr/>
         </p:nvSpPr>
         <p:spPr>
           <a:xfrm>
-            <a:off x="548640" y="2587752"/>
+            <a:off x="548640" y="2366264"/>
             <a:ext cx="548640" cy="548640"/>
           </a:xfrm>
           <a:prstGeom prst="ellipse">
@@ -7238,13 +7370,13 @@
       </p:sp>
       <p:sp>
         <p:nvSpPr>
-          <p:cNvPr id="10" name="S07-text113"/>
+          <p:cNvPr id="10" name="S07-text117"/>
           <p:cNvSpPr txBox="1"/>
           <p:nvPr/>
         </p:nvSpPr>
         <p:spPr>
           <a:xfrm>
-            <a:off x="1325880" y="2587752"/>
+            <a:off x="1325880" y="2366264"/>
             <a:ext cx="5122012" cy="548640"/>
           </a:xfrm>
           <a:prstGeom prst="rect">
@@ -7277,13 +7409,13 @@
       </p:sp>
       <p:sp>
         <p:nvSpPr>
-          <p:cNvPr id="11" name="S07-stepno114"/>
+          <p:cNvPr id="11" name="S07-stepno118"/>
           <p:cNvSpPr txBox="1"/>
           <p:nvPr/>
         </p:nvSpPr>
         <p:spPr>
           <a:xfrm>
-            <a:off x="548640" y="3300984"/>
+            <a:off x="548640" y="3079496"/>
             <a:ext cx="548640" cy="548640"/>
           </a:xfrm>
           <a:prstGeom prst="ellipse">
@@ -7322,13 +7454,13 @@
       </p:sp>
       <p:sp>
         <p:nvSpPr>
-          <p:cNvPr id="12" name="S07-text115"/>
+          <p:cNvPr id="12" name="S07-text119"/>
           <p:cNvSpPr txBox="1"/>
           <p:nvPr/>
         </p:nvSpPr>
         <p:spPr>
           <a:xfrm>
-            <a:off x="1325880" y="3300984"/>
+            <a:off x="1325880" y="3079496"/>
             <a:ext cx="5122012" cy="548640"/>
           </a:xfrm>
           <a:prstGeom prst="rect">
@@ -7361,13 +7493,13 @@
       </p:sp>
       <p:sp>
         <p:nvSpPr>
-          <p:cNvPr id="13" name="S07-stepno116"/>
+          <p:cNvPr id="13" name="S07-stepno120"/>
           <p:cNvSpPr txBox="1"/>
           <p:nvPr/>
         </p:nvSpPr>
         <p:spPr>
           <a:xfrm>
-            <a:off x="548640" y="4014216"/>
+            <a:off x="548640" y="3792728"/>
             <a:ext cx="548640" cy="548640"/>
           </a:xfrm>
           <a:prstGeom prst="ellipse">
@@ -7406,13 +7538,13 @@
       </p:sp>
       <p:sp>
         <p:nvSpPr>
-          <p:cNvPr id="14" name="S07-text117"/>
+          <p:cNvPr id="14" name="S07-text121"/>
           <p:cNvSpPr txBox="1"/>
           <p:nvPr/>
         </p:nvSpPr>
         <p:spPr>
           <a:xfrm>
-            <a:off x="1325880" y="4014216"/>
+            <a:off x="1325880" y="3792728"/>
             <a:ext cx="5122012" cy="548640"/>
           </a:xfrm>
           <a:prstGeom prst="rect">
@@ -7559,7 +7691,7 @@
       </p:sp>
       <p:sp>
         <p:nvSpPr>
-          <p:cNvPr id="3" name="S08-card118"/>
+          <p:cNvPr id="3" name="S08-card122"/>
           <p:cNvSpPr/>
           <p:nvPr/>
         </p:nvSpPr>
@@ -7586,7 +7718,7 @@
       </p:sp>
       <p:sp>
         <p:nvSpPr>
-          <p:cNvPr id="4" name="S08-cardtext119"/>
+          <p:cNvPr id="4" name="S08-cardtext123"/>
           <p:cNvSpPr txBox="1"/>
           <p:nvPr/>
         </p:nvSpPr>
@@ -7628,7 +7760,7 @@
       </p:sp>
       <p:sp>
         <p:nvSpPr>
-          <p:cNvPr id="5" name="S08-chip120"/>
+          <p:cNvPr id="5" name="S08-chip124"/>
           <p:cNvSpPr txBox="1"/>
           <p:nvPr/>
         </p:nvSpPr>
@@ -7675,7 +7807,7 @@
       </p:sp>
       <p:sp>
         <p:nvSpPr>
-          <p:cNvPr id="6" name="S08-chip121"/>
+          <p:cNvPr id="6" name="S08-chip125"/>
           <p:cNvSpPr txBox="1"/>
           <p:nvPr/>
         </p:nvSpPr>
@@ -7722,7 +7854,7 @@
       </p:sp>
       <p:sp>
         <p:nvSpPr>
-          <p:cNvPr id="7" name="S08-text122"/>
+          <p:cNvPr id="7" name="S08-text126"/>
           <p:cNvSpPr txBox="1"/>
           <p:nvPr/>
         </p:nvSpPr>
@@ -7761,7 +7893,7 @@
       </p:sp>
       <p:sp>
         <p:nvSpPr>
-          <p:cNvPr id="8" name="S08-text123"/>
+          <p:cNvPr id="8" name="S08-text127"/>
           <p:cNvSpPr txBox="1"/>
           <p:nvPr/>
         </p:nvSpPr>
@@ -7817,7 +7949,7 @@
       </p:sp>
       <p:sp>
         <p:nvSpPr>
-          <p:cNvPr id="9" name="S08-text124"/>
+          <p:cNvPr id="9" name="S08-text128"/>
           <p:cNvSpPr txBox="1"/>
           <p:nvPr/>
         </p:nvSpPr>
@@ -7873,7 +8005,7 @@
       </p:sp>
       <p:sp>
         <p:nvSpPr>
-          <p:cNvPr id="10" name="S08-text125"/>
+          <p:cNvPr id="10" name="S08-text129"/>
           <p:cNvSpPr txBox="1"/>
           <p:nvPr/>
         </p:nvSpPr>
@@ -7929,7 +8061,7 @@
       </p:sp>
       <p:sp>
         <p:nvSpPr>
-          <p:cNvPr id="11" name="S08-text126"/>
+          <p:cNvPr id="11" name="S08-text130"/>
           <p:cNvSpPr txBox="1"/>
           <p:nvPr/>
         </p:nvSpPr>
@@ -8082,7 +8214,7 @@
       </p:sp>
       <p:sp>
         <p:nvSpPr>
-          <p:cNvPr id="3" name="S09-text127"/>
+          <p:cNvPr id="3" name="S09-text131"/>
           <p:cNvSpPr txBox="1"/>
           <p:nvPr/>
         </p:nvSpPr>
@@ -8121,7 +8253,7 @@
       </p:sp>
       <p:sp>
         <p:nvSpPr>
-          <p:cNvPr id="4" name="S09-card128"/>
+          <p:cNvPr id="4" name="S09-card132"/>
           <p:cNvSpPr/>
           <p:nvPr/>
         </p:nvSpPr>
@@ -8148,7 +8280,7 @@
       </p:sp>
       <p:sp>
         <p:nvSpPr>
-          <p:cNvPr id="5" name="S09-cardtext129"/>
+          <p:cNvPr id="5" name="S09-cardtext133"/>
           <p:cNvSpPr txBox="1"/>
           <p:nvPr/>
         </p:nvSpPr>
@@ -8190,7 +8322,7 @@
       </p:sp>
       <p:sp>
         <p:nvSpPr>
-          <p:cNvPr id="6" name="S09-card130"/>
+          <p:cNvPr id="6" name="S09-card134"/>
           <p:cNvSpPr/>
           <p:nvPr/>
         </p:nvSpPr>
@@ -8217,7 +8349,7 @@
       </p:sp>
       <p:sp>
         <p:nvSpPr>
-          <p:cNvPr id="7" name="S09-cardtext131"/>
+          <p:cNvPr id="7" name="S09-cardtext135"/>
           <p:cNvSpPr txBox="1"/>
           <p:nvPr/>
         </p:nvSpPr>
@@ -8279,7 +8411,7 @@
       </p:sp>
       <p:sp>
         <p:nvSpPr>
-          <p:cNvPr id="8" name="S09-card132"/>
+          <p:cNvPr id="8" name="S09-card136"/>
           <p:cNvSpPr/>
           <p:nvPr/>
         </p:nvSpPr>
@@ -8306,7 +8438,7 @@
       </p:sp>
       <p:sp>
         <p:nvSpPr>
-          <p:cNvPr id="9" name="S09-cardtext133"/>
+          <p:cNvPr id="9" name="S09-cardtext137"/>
           <p:cNvSpPr txBox="1"/>
           <p:nvPr/>
         </p:nvSpPr>
@@ -8368,7 +8500,7 @@
       </p:sp>
       <p:sp>
         <p:nvSpPr>
-          <p:cNvPr id="10" name="S09-card134"/>
+          <p:cNvPr id="10" name="S09-card138"/>
           <p:cNvSpPr/>
           <p:nvPr/>
         </p:nvSpPr>
@@ -8395,7 +8527,7 @@
       </p:sp>
       <p:sp>
         <p:nvSpPr>
-          <p:cNvPr id="11" name="S09-cardtext135"/>
+          <p:cNvPr id="11" name="S09-cardtext139"/>
           <p:cNvSpPr txBox="1"/>
           <p:nvPr/>
         </p:nvSpPr>

--- a/dist/초2/환경·생태/생활과환경/초2_환경·생태_생활과환경_01_학교와마을의환경_학생용.pptx
+++ b/dist/초2/환경·생태/생활과환경/초2_환경·생태_생활과환경_01_학교와마을의환경_학생용.pptx
@@ -115,41 +115,41 @@
   <p:extLst>
     <p:ext uri="{521415D9-36F7-43E2-AB2F-B90AF26B5E84}">
       <p14:sectionLst xmlns:p14="http://schemas.microsoft.com/office/powerpoint/2010/main">
-        <p14:section name="도입" id="{26123985-4b1a-154c-fe2e-98e358318cd6}">
+        <p14:section name="도입" id="{68c39e4c-597f-8b8d-8f52-5908ce8b2291}">
           <p14:sldIdLst>
             <p14:sldId id="256"/>
             <p14:sldId id="257"/>
           </p14:sldIdLst>
         </p14:section>
-        <p14:section name="개념" id="{e156da47-0f5e-49a1-bdee-08dcb1647e35}">
+        <p14:section name="개념" id="{55b1f4b9-dbc3-4baf-8160-84a828cfc133}">
           <p14:sldIdLst>
             <p14:sldId id="258"/>
             <p14:sldId id="260"/>
           </p14:sldIdLst>
         </p14:section>
-        <p14:section name="연습" id="{ee8d31d6-23e5-395f-6e8d-eafa083a9771}">
+        <p14:section name="연습" id="{c1c4f56b-1ad6-4d6d-40b9-8803aee7d2e6}">
           <p14:sldIdLst>
             <p14:sldId id="259"/>
             <p14:sldId id="261"/>
           </p14:sldIdLst>
         </p14:section>
-        <p14:section name="개념" id="{4e786a5d-1085-ae20-0460-42ffb30fd500}">
+        <p14:section name="개념" id="{8fd68a5d-6387-57c4-e57b-63eb384a6895}">
           <p14:sldIdLst/>
         </p14:section>
-        <p14:section name="연습" id="{d86fe57f-9864-c3fd-ed70-a08153b0ab97}">
+        <p14:section name="연습" id="{52f496ce-33dd-3f99-5d6f-a24e4dc27ef3}">
           <p14:sldIdLst/>
         </p14:section>
-        <p14:section name="확인" id="{eea0451e-325b-2226-9946-747aa43b70ac}">
+        <p14:section name="확인" id="{f8df20a6-4833-36d5-8646-98728c379ba9}">
           <p14:sldIdLst>
             <p14:sldId id="262"/>
           </p14:sldIdLst>
         </p14:section>
-        <p14:section name="정리" id="{42be1596-ff83-287c-4331-63f90a2c7f11}">
+        <p14:section name="정리" id="{371875cb-02d9-4cea-9862-1da4eed21d81}">
           <p14:sldIdLst>
             <p14:sldId id="263"/>
           </p14:sldIdLst>
         </p14:section>
-        <p14:section name="보충" id="{af1832a5-937c-186f-b783-5f21c67d011e}">
+        <p14:section name="보충" id="{47894633-97c2-87b0-8dc3-c1bca0694f18}">
           <p14:sldIdLst>
             <p14:sldId id="264"/>
           </p14:sldIdLst>

--- a/dist/초2/환경·생태/생활과환경/초2_환경·생태_생활과환경_01_학교와마을의환경_학생용.pptx
+++ b/dist/초2/환경·생태/생활과환경/초2_환경·생태_생활과환경_01_학교와마을의환경_학생용.pptx
@@ -115,41 +115,41 @@
   <p:extLst>
     <p:ext uri="{521415D9-36F7-43E2-AB2F-B90AF26B5E84}">
       <p14:sectionLst xmlns:p14="http://schemas.microsoft.com/office/powerpoint/2010/main">
-        <p14:section name="도입" id="{68c39e4c-597f-8b8d-8f52-5908ce8b2291}">
+        <p14:section name="도입" id="{4ee40330-a55c-99e3-b047-18c529bd8bd7}">
           <p14:sldIdLst>
             <p14:sldId id="256"/>
             <p14:sldId id="257"/>
           </p14:sldIdLst>
         </p14:section>
-        <p14:section name="개념" id="{55b1f4b9-dbc3-4baf-8160-84a828cfc133}">
+        <p14:section name="개념" id="{d99f6946-aef3-d9c2-5f0e-66aa2d50a700}">
           <p14:sldIdLst>
             <p14:sldId id="258"/>
             <p14:sldId id="260"/>
           </p14:sldIdLst>
         </p14:section>
-        <p14:section name="연습" id="{c1c4f56b-1ad6-4d6d-40b9-8803aee7d2e6}">
+        <p14:section name="연습" id="{5496a5da-9c8c-a1fb-5491-0d9ef1756b2f}">
           <p14:sldIdLst>
             <p14:sldId id="259"/>
             <p14:sldId id="261"/>
           </p14:sldIdLst>
         </p14:section>
-        <p14:section name="개념" id="{8fd68a5d-6387-57c4-e57b-63eb384a6895}">
+        <p14:section name="개념" id="{a2cec555-130c-49f4-a973-95095e84caf9}">
           <p14:sldIdLst/>
         </p14:section>
-        <p14:section name="연습" id="{52f496ce-33dd-3f99-5d6f-a24e4dc27ef3}">
+        <p14:section name="연습" id="{2aca810d-67bd-9d43-6933-10b4b0c39c92}">
           <p14:sldIdLst/>
         </p14:section>
-        <p14:section name="확인" id="{f8df20a6-4833-36d5-8646-98728c379ba9}">
+        <p14:section name="확인" id="{ea074660-0f11-130b-176b-3b73cd66686f}">
           <p14:sldIdLst>
             <p14:sldId id="262"/>
           </p14:sldIdLst>
         </p14:section>
-        <p14:section name="정리" id="{371875cb-02d9-4cea-9862-1da4eed21d81}">
+        <p14:section name="정리" id="{a37713a0-5850-4290-e995-0732f77c87ee}">
           <p14:sldIdLst>
             <p14:sldId id="263"/>
           </p14:sldIdLst>
         </p14:section>
-        <p14:section name="보충" id="{47894633-97c2-87b0-8dc3-c1bca0694f18}">
+        <p14:section name="보충" id="{6afbe69e-5ea6-68fc-2e17-83cae243944b}">
           <p14:sldIdLst>
             <p14:sldId id="264"/>
           </p14:sldIdLst>
